--- a/e2e/fixtures/canvas-interaction.pptx
+++ b/e2e/fixtures/canvas-interaction.pptx
@@ -195,6 +195,41 @@
             <a:r>
               <a:rPr lang="en-US" sz="1400"/>
               <a:t>Rounded</a:t>
+            </a:r>
+          </a:p>
+        </p:txBody>
+      </p:sp>
+      <p:sp>
+        <p:nvSpPr>
+          <p:cNvPr id="7" name="Arrow"/>
+          <p:cNvSpPr/>
+          <p:nvPr/>
+        </p:nvSpPr>
+        <p:spPr>
+          <a:xfrm>
+            <a:off x="4064000" y="3175000"/>
+            <a:ext cx="2794000" cy="1397000"/>
+          </a:xfrm>
+          <a:prstGeom prst="rightArrow">
+            <a:avLst/>
+          </a:prstGeom>
+          <a:solidFill>
+            <a:srgbClr val="E2EFDA"/>
+          </a:solidFill>
+          <a:ln w="12700">
+            <a:solidFill>
+              <a:srgbClr val="1F3864"/>
+            </a:solidFill>
+          </a:ln>
+        </p:spPr>
+        <p:txBody>
+          <a:bodyPr/>
+          <a:lstStyle/>
+          <a:p>
+            <a:pPr algn="ctr"/>
+            <a:r>
+              <a:rPr lang="en-US" sz="1400"/>
+              <a:t>Arrow</a:t>
             </a:r>
           </a:p>
         </p:txBody>
